--- a/examples/pm9_delete_csl/delete_csl_guide.pptx
+++ b/examples/pm9_delete_csl/delete_csl_guide.pptx
@@ -589,9 +589,7 @@
               <a:t>NOTE_CONTENT_FORMAT: 1.0</a:t>
             </a:r>
           </a:p>
-          <a:p>
-            <a:endParaRPr/>
-          </a:p>
+          <a:p/>
           <a:p>
             <a:r>
               <a:t>===BLOCK===</a:t>
@@ -602,9 +600,7 @@
               <a:t>{{BLOCK:IMAGE}}</a:t>
             </a:r>
           </a:p>
-          <a:p>
-            <a:endParaRPr/>
-          </a:p>
+          <a:p/>
           <a:p>
             <a:r>
               <a:t>export-image-mode: slide_with_rectpct</a:t>
@@ -620,45 +616,34 @@
               <a:t>export-image: extracted/figures/&lt;__BASEFILENAME__&gt;_slide&lt;__SLIDENUM__&gt;_fig.png</a:t>
             </a:r>
           </a:p>
-          <a:p>
-            <a:endParaRPr lang="en-US"/>
-          </a:p>
-          <a:p>
-            <a:r>
-              <a:rPr lang="en-US"/>
+          <a:p/>
+          <a:p>
+            <a:r>
               <a:t>===BLOCK===</a:t>
             </a:r>
           </a:p>
           <a:p>
             <a:r>
-              <a:rPr lang="en-US"/>
               <a:t>{{BLOCK:IMAGE}}</a:t>
             </a:r>
           </a:p>
-          <a:p>
-            <a:endParaRPr lang="en-US"/>
-          </a:p>
-          <a:p>
-            <a:r>
-              <a:rPr lang="en-US"/>
+          <a:p/>
+          <a:p>
+            <a:r>
               <a:t>export-image-mode: slide_with_rectpct</a:t>
             </a:r>
           </a:p>
           <a:p>
             <a:r>
-              <a:rPr lang="en-US"/>
               <a:t>export-image-target: keyvisual</a:t>
             </a:r>
           </a:p>
           <a:p>
             <a:r>
-              <a:rPr lang="en-US"/>
               <a:t>export-image: extracted/figures/&lt;__BASEFILENAME__&gt;_keyvisual.png</a:t>
             </a:r>
           </a:p>
-          <a:p>
-            <a:endParaRPr/>
-          </a:p>
+          <a:p/>
           <a:p>
             <a:r>
               <a:t>===BLOCK===</a:t>
@@ -669,9 +654,7 @@
               <a:t>{{BLOCK:MD:LONG}}</a:t>
             </a:r>
           </a:p>
-          <a:p>
-            <a:endParaRPr/>
-          </a:p>
+          <a:p/>
           <a:p>
             <a:r>
               <a:t>export-note: extracted/&lt;__BASEFILENAME__&gt;_slide&lt;__SLIDENUM__&gt;_md.md</a:t>
@@ -687,95 +670,59 @@
               <a:t>## &lt;__TITLE__&gt;</a:t>
             </a:r>
           </a:p>
-          <a:p>
-            <a:endParaRPr/>
-          </a:p>
+          <a:p/>
           <a:p>
             <a:r>
               <a:t>研修テキストのような資料を作るときは、１スライドまるごと配付資料から削除したいときもあります。</a:t>
             </a:r>
           </a:p>
-          <a:p>
-            <a:endParaRPr/>
-          </a:p>
+          <a:p/>
           <a:p>
             <a:r>
               <a:t>そこで使えるのが配付資料には載せたくないスライドに特殊マーカーを記入しておくと、マージ時に一括してスライドごと削除する機能です。</a:t>
             </a:r>
           </a:p>
-          <a:p>
-            <a:endParaRPr/>
-          </a:p>
+          <a:p/>
           <a:p>
             <a:r>
               <a:t>結合指示書による on/off が可能で、起動時オプションでも設定できるので、講師用/受講者用の2種類を簡単に生成しわけられます。</a:t>
             </a:r>
           </a:p>
-          <a:p>
-            <a:endParaRPr/>
-          </a:p>
-          <a:p>
-            <a:r>
-              <a:t>```{=latex}</a:t>
-            </a:r>
-          </a:p>
-          <a:p>
-            <a:r>
-              <a:t>\par\vspace{1\baselineskip}</a:t>
-            </a:r>
-          </a:p>
-          <a:p>
-            <a:r>
-              <a:t>\begin{center}</a:t>
-            </a:r>
-          </a:p>
-          <a:p>
-            <a:r>
-              <a:t>```</a:t>
-            </a:r>
-          </a:p>
-          <a:p>
-            <a:endParaRPr/>
-          </a:p>
+          <a:p/>
+          <a:p>
+            <a:r>
+              <a:t>{{vspace:1}}</a:t>
+            </a:r>
+          </a:p>
+          <a:p/>
+          <a:p>
+            <a:r>
+              <a:t>::: {.center}</a:t>
+            </a:r>
+          </a:p>
+          <a:p/>
           <a:p>
             <a:r>
               <a:t>![](figures/&lt;__BASEFILENAME__&gt;_slide&lt;__SLIDENUM__&gt;_fig.png){ width=95% }</a:t>
             </a:r>
-            <a:endParaRPr lang="en-US"/>
-          </a:p>
-          <a:p>
-            <a:endParaRPr lang="en-US"/>
-          </a:p>
-          <a:p>
-            <a:r>
-              <a:rPr lang="en-US"/>
+          </a:p>
+          <a:p/>
+          <a:p>
+            <a:r>
               <a:t>![](figures/&lt;__BASEFILENAME__&gt;_keyvisual.png){ width=80% }</a:t>
             </a:r>
           </a:p>
-          <a:p>
-            <a:endParaRPr/>
-          </a:p>
-          <a:p>
-            <a:endParaRPr/>
-          </a:p>
-          <a:p>
-            <a:r>
-              <a:t>```{=latex}</a:t>
-            </a:r>
-          </a:p>
-          <a:p>
-            <a:r>
-              <a:t>\end{center}</a:t>
-            </a:r>
-          </a:p>
-          <a:p>
-            <a:r>
-              <a:t>\par\vspace{1\baselineskip}</a:t>
-            </a:r>
-          </a:p>
-          <a:p>
-            <a:r>
-              <a:t>```</a:t>
+          <a:p/>
+          <a:p/>
+          <a:p>
+            <a:r>
+              <a:t>:::</a:t>
+            </a:r>
+          </a:p>
+          <a:p/>
+          <a:p>
+            <a:r>
+              <a:t>{{vspace:1}}</a:t>
             </a:r>
           </a:p>
         </p:txBody>
@@ -882,9 +829,7 @@
               <a:t>NOTE_CONTENT_FORMAT: 1.0</a:t>
             </a:r>
           </a:p>
-          <a:p>
-            <a:endParaRPr/>
-          </a:p>
+          <a:p/>
           <a:p>
             <a:r>
               <a:t>===BLOCK===</a:t>
@@ -895,9 +840,7 @@
               <a:t>{{BLOCK:IMAGE}}</a:t>
             </a:r>
           </a:p>
-          <a:p>
-            <a:endParaRPr/>
-          </a:p>
+          <a:p/>
           <a:p>
             <a:r>
               <a:t>export-image-mode: slide_with_rectpct</a:t>
@@ -913,9 +856,7 @@
               <a:t>export-image: extracted/figures/&lt;__BASEFILENAME__&gt;_slide&lt;__SLIDENUM__&gt;_fig.png</a:t>
             </a:r>
           </a:p>
-          <a:p>
-            <a:endParaRPr/>
-          </a:p>
+          <a:p/>
           <a:p>
             <a:r>
               <a:t>===BLOCK===</a:t>
@@ -926,9 +867,7 @@
               <a:t>{{BLOCK:MD:LONG}}</a:t>
             </a:r>
           </a:p>
-          <a:p>
-            <a:endParaRPr/>
-          </a:p>
+          <a:p/>
           <a:p>
             <a:r>
               <a:t>export-note: extracted/&lt;__BASEFILENAME__&gt;_slide&lt;__SLIDENUM__&gt;_md.md</a:t>
@@ -944,74 +883,46 @@
               <a:t>## &lt;__TITLE__&gt;</a:t>
             </a:r>
           </a:p>
-          <a:p>
-            <a:endParaRPr/>
-          </a:p>
+          <a:p/>
           <a:p>
             <a:r>
               <a:t>スライド削除機能を使うと、1種類のソースpptxをもとにして、外部配布用と内部用資料を作り分けられます。</a:t>
             </a:r>
           </a:p>
-          <a:p>
-            <a:endParaRPr/>
-          </a:p>
+          <a:p/>
           <a:p>
             <a:r>
               <a:t>分割insertionでも似たことが可能ですが、 CSL は削除対象のスライドそのものにマーカーを書けばよいので、対象スライドを選択しやすいメリットがあります。</a:t>
             </a:r>
           </a:p>
-          <a:p>
-            <a:endParaRPr/>
-          </a:p>
-          <a:p>
-            <a:r>
-              <a:t>```{=latex}</a:t>
-            </a:r>
-          </a:p>
-          <a:p>
-            <a:r>
-              <a:t>\par\vspace{1\baselineskip}</a:t>
-            </a:r>
-          </a:p>
-          <a:p>
-            <a:r>
-              <a:t>\begin{center}</a:t>
-            </a:r>
-          </a:p>
-          <a:p>
-            <a:r>
-              <a:t>```</a:t>
-            </a:r>
-          </a:p>
-          <a:p>
-            <a:endParaRPr/>
-          </a:p>
+          <a:p/>
+          <a:p>
+            <a:r>
+              <a:t>{{vspace:1}}</a:t>
+            </a:r>
+          </a:p>
+          <a:p/>
+          <a:p>
+            <a:r>
+              <a:t>::: {.center}</a:t>
+            </a:r>
+          </a:p>
+          <a:p/>
           <a:p>
             <a:r>
               <a:t>![](figures/&lt;__BASEFILENAME__&gt;_slide&lt;__SLIDENUM__&gt;_fig.png){ width=95% }</a:t>
             </a:r>
           </a:p>
-          <a:p>
-            <a:endParaRPr/>
-          </a:p>
-          <a:p>
-            <a:r>
-              <a:t>```{=latex}</a:t>
-            </a:r>
-          </a:p>
-          <a:p>
-            <a:r>
-              <a:t>\end{center}</a:t>
-            </a:r>
-          </a:p>
-          <a:p>
-            <a:r>
-              <a:t>\par\vspace{1\baselineskip}</a:t>
-            </a:r>
-          </a:p>
-          <a:p>
-            <a:r>
-              <a:t>```</a:t>
+          <a:p/>
+          <a:p>
+            <a:r>
+              <a:t>:::</a:t>
+            </a:r>
+          </a:p>
+          <a:p/>
+          <a:p>
+            <a:r>
+              <a:t>{{vspace:1}}</a:t>
             </a:r>
           </a:p>
         </p:txBody>
@@ -1232,9 +1143,7 @@
               <a:t>NOTE_CONTENT_FORMAT: 1.0</a:t>
             </a:r>
           </a:p>
-          <a:p>
-            <a:endParaRPr/>
-          </a:p>
+          <a:p/>
           <a:p>
             <a:r>
               <a:t>===BLOCK===</a:t>
@@ -1245,9 +1154,7 @@
               <a:t>{{BLOCK:IMAGE}}</a:t>
             </a:r>
           </a:p>
-          <a:p>
-            <a:endParaRPr/>
-          </a:p>
+          <a:p/>
           <a:p>
             <a:r>
               <a:t>export-image-mode: slide_with_rectpct</a:t>
@@ -1263,9 +1170,7 @@
               <a:t>export-image: extracted/figures/&lt;__BASEFILENAME__&gt;_slide&lt;__SLIDENUM__&gt;_fig.png</a:t>
             </a:r>
           </a:p>
-          <a:p>
-            <a:endParaRPr/>
-          </a:p>
+          <a:p/>
           <a:p>
             <a:r>
               <a:t>===BLOCK===</a:t>
@@ -1276,9 +1181,7 @@
               <a:t>{{BLOCK:MD:LONG}}</a:t>
             </a:r>
           </a:p>
-          <a:p>
-            <a:endParaRPr/>
-          </a:p>
+          <a:p/>
           <a:p>
             <a:r>
               <a:t>export-note: extracted/&lt;__BASEFILENAME__&gt;_slide&lt;__SLIDENUM__&gt;_md.md</a:t>
@@ -1294,82 +1197,52 @@
               <a:t>## &lt;__TITLE__&gt;</a:t>
             </a:r>
           </a:p>
-          <a:p>
-            <a:endParaRPr/>
-          </a:p>
+          <a:p/>
           <a:p>
             <a:r>
               <a:t>CSLマーカーはスライドの編集を邪魔しないよう、隅に小さく入れる場合もあれば、目立つように注釈つきで入れておく場合もあります。</a:t>
             </a:r>
           </a:p>
-          <a:p>
-            <a:endParaRPr/>
-          </a:p>
+          <a:p/>
           <a:p>
             <a:r>
               <a:t>結合指示書で  indexer.deletecsl: true とするか、--deletecsl オプションにより CSLが有効になります。</a:t>
             </a:r>
           </a:p>
-          <a:p>
-            <a:endParaRPr/>
-          </a:p>
+          <a:p/>
           <a:p>
             <a:r>
               <a:t>deletecsl がfalseまたは未指定の場合は、CSLマーカーだけが消去されます。</a:t>
             </a:r>
           </a:p>
-          <a:p>
-            <a:endParaRPr/>
-          </a:p>
-          <a:p>
-            <a:r>
-              <a:t>```{=latex}</a:t>
-            </a:r>
-          </a:p>
-          <a:p>
-            <a:r>
-              <a:t>\par\vspace{1\baselineskip}</a:t>
-            </a:r>
-          </a:p>
-          <a:p>
-            <a:r>
-              <a:t>\begin{center}</a:t>
-            </a:r>
-          </a:p>
-          <a:p>
-            <a:r>
-              <a:t>```</a:t>
-            </a:r>
-          </a:p>
-          <a:p>
-            <a:endParaRPr/>
-          </a:p>
+          <a:p/>
+          <a:p>
+            <a:r>
+              <a:t>{{vspace:1}}</a:t>
+            </a:r>
+          </a:p>
+          <a:p/>
+          <a:p>
+            <a:r>
+              <a:t>::: {.center}</a:t>
+            </a:r>
+          </a:p>
+          <a:p/>
           <a:p>
             <a:r>
               <a:t>![](figures/&lt;__BASEFILENAME__&gt;_slide&lt;__SLIDENUM__&gt;_fig.png){ width=95% }</a:t>
             </a:r>
           </a:p>
-          <a:p>
-            <a:endParaRPr/>
-          </a:p>
-          <a:p>
-            <a:r>
-              <a:t>```{=latex}</a:t>
-            </a:r>
-          </a:p>
-          <a:p>
-            <a:r>
-              <a:t>\end{center}</a:t>
-            </a:r>
-          </a:p>
-          <a:p>
-            <a:r>
-              <a:t>\par\vspace{1\baselineskip}</a:t>
-            </a:r>
-          </a:p>
-          <a:p>
-            <a:r>
-              <a:t>```</a:t>
+          <a:p/>
+          <a:p>
+            <a:r>
+              <a:t>:::</a:t>
+            </a:r>
+          </a:p>
+          <a:p/>
+          <a:p>
+            <a:r>
+              <a:t>{{vspace:1}}</a:t>
             </a:r>
           </a:p>
         </p:txBody>
